--- a/kvcache/unified_kv_memory/进度汇报/统一异构KVCache存储池进展汇报_20260824_v0.pptx
+++ b/kvcache/unified_kv_memory/进度汇报/统一异构KVCache存储池进展汇报_20260824_v0.pptx
@@ -857,7 +857,7 @@
           <a:lstStyle/>
           <a:p>
             <a:r>
-              <a:t>最后汇报下一步工作计划与风险。我们下阶段的工作重点分为两方面：一是与评审专家深入沟通，以实测数据和消融报告推动专家接纳立项；二是持续推进 11 项提前验证。针对当前仅有 2 到 3 人参与、验证项多达 11 个的核心人力风险，我们采取分批聚焦突破、复用开源资产以及申请专项人力增援等措施，确保项目稳步推进。</a:t>
+              <a:t>最后汇报下一步工作计划与风险。我们下阶段的工作重点分为两方面：一是与评审专家深入沟通，以实测数据和消融报告推动专家接纳立项；二是持续推进 11 项提前验证。针对当前仅有 2 到 3 人参与、验证项多达 11 个的核心人力风险，我们采取分批聚焦突破、复用开源资产、申请专项人力增援以及设立量化止损门限等措施，确保项目稳步推进。</a:t>
             </a:r>
           </a:p>
         </p:txBody>
@@ -4480,8 +4480,8 @@
         </p:nvSpPr>
         <p:spPr>
           <a:xfrm>
-            <a:off x="466344" y="2441448"/>
-            <a:ext cx="5422392" cy="1865375"/>
+            <a:off x="466344" y="2423160"/>
+            <a:ext cx="5422392" cy="1901951"/>
           </a:xfrm>
           <a:prstGeom prst="rect">
             <a:avLst/>
@@ -4507,14 +4507,14 @@
           <a:p>
             <a:pPr>
               <a:lnSpc>
-                <a:spcPct val="120000"/>
+                <a:spcPct val="118000"/>
               </a:lnSpc>
               <a:spcBef>
-                <a:spcPts val="600"/>
+                <a:spcPts val="400"/>
               </a:spcBef>
             </a:pPr>
             <a:r>
-              <a:rPr sz="1150" b="1">
+              <a:rPr sz="1100" b="1">
                 <a:solidFill>
                   <a:srgbClr val="1E3A8A"/>
                 </a:solidFill>
@@ -4523,7 +4523,7 @@
               <a:t>• 路线定位升级：</a:t>
             </a:r>
             <a:r>
-              <a:rPr sz="1150" b="0">
+              <a:rPr sz="1100" b="0">
                 <a:solidFill>
                   <a:srgbClr val="0F172A"/>
                 </a:solidFill>
@@ -4533,7 +4533,7 @@
 </a:t>
             </a:r>
             <a:r>
-              <a:rPr sz="1150" b="1">
+              <a:rPr sz="1100" b="1">
                 <a:solidFill>
                   <a:srgbClr val="1E3A8A"/>
                 </a:solidFill>
@@ -4542,13 +4542,32 @@
               <a:t>• 需求精准收拢：</a:t>
             </a:r>
             <a:r>
-              <a:rPr sz="1150" b="0">
+              <a:rPr sz="1100" b="0">
                 <a:solidFill>
                   <a:srgbClr val="0F172A"/>
                 </a:solidFill>
                 <a:latin typeface="Microsoft YaHei"/>
               </a:rPr>
-              <a:t>将 38 条 SR 需求 100% 收拢为 5 大技术增强工程包，突出原厂软硬件协同核心增益。</a:t>
+              <a:t>将 38 条 SR 需求 100% 收拢为 5 大技术增强工程包，突出原厂软硬件协同核心增益；
+</a:t>
+            </a:r>
+            <a:r>
+              <a:rPr sz="1100" b="1">
+                <a:solidFill>
+                  <a:srgbClr val="1E3A8A"/>
+                </a:solidFill>
+                <a:latin typeface="Microsoft YaHei"/>
+              </a:rPr>
+              <a:t>• 闭环原则确立：</a:t>
+            </a:r>
+            <a:r>
+              <a:rPr sz="1100" b="0">
+                <a:solidFill>
+                  <a:srgbClr val="0F172A"/>
+                </a:solidFill>
+                <a:latin typeface="Microsoft YaHei"/>
+              </a:rPr>
+              <a:t>对外兼容主流生态接口，对内重构核心数据通路与调度内核，兼顾生态与性能。</a:t>
             </a:r>
           </a:p>
         </p:txBody>
@@ -4649,8 +4668,8 @@
         </p:nvSpPr>
         <p:spPr>
           <a:xfrm>
-            <a:off x="6327648" y="2441448"/>
-            <a:ext cx="5422392" cy="1865375"/>
+            <a:off x="6327648" y="2423160"/>
+            <a:ext cx="5422392" cy="1901951"/>
           </a:xfrm>
           <a:prstGeom prst="rect">
             <a:avLst/>
@@ -4676,14 +4695,14 @@
           <a:p>
             <a:pPr>
               <a:lnSpc>
-                <a:spcPct val="120000"/>
+                <a:spcPct val="118000"/>
               </a:lnSpc>
               <a:spcBef>
-                <a:spcPts val="600"/>
+                <a:spcPts val="400"/>
               </a:spcBef>
             </a:pPr>
             <a:r>
-              <a:rPr sz="1150" b="1">
+              <a:rPr sz="1100" b="1">
                 <a:solidFill>
                   <a:srgbClr val="1E3A8A"/>
                 </a:solidFill>
@@ -4692,7 +4711,7 @@
               <a:t>• 方案与代码归档：</a:t>
             </a:r>
             <a:r>
-              <a:rPr sz="1150" b="0">
+              <a:rPr sz="1100" b="0">
                 <a:solidFill>
                   <a:srgbClr val="0F172A"/>
                 </a:solidFill>
@@ -4702,7 +4721,7 @@
 </a:t>
             </a:r>
             <a:r>
-              <a:rPr sz="1150" b="1">
+              <a:rPr sz="1100" b="1">
                 <a:solidFill>
                   <a:srgbClr val="1E3A8A"/>
                 </a:solidFill>
@@ -4711,13 +4730,32 @@
               <a:t>• 工程规范统一：</a:t>
             </a:r>
             <a:r>
-              <a:rPr sz="1150" b="0">
+              <a:rPr sz="1100" b="0">
                 <a:solidFill>
                   <a:srgbClr val="0F172A"/>
                 </a:solidFill>
                 <a:latin typeface="Microsoft YaHei"/>
               </a:rPr>
-              <a:t>固化 9 大标准化工程模块、P0(5项)/P1(4项)/P2(2项) 三级优先级及明确的量化测试门限。</a:t>
+              <a:t>固化 9 大标准化工程模块、P0(5项)/P1(4项)/P2(2项) 三级优先级及明确的量化测试门限；
+</a:t>
+            </a:r>
+            <a:r>
+              <a:rPr sz="1100" b="1">
+                <a:solidFill>
+                  <a:srgbClr val="1E3A8A"/>
+                </a:solidFill>
+                <a:latin typeface="Microsoft YaHei"/>
+              </a:rPr>
+              <a:t>• 证据门禁确立：</a:t>
+            </a:r>
+            <a:r>
+              <a:rPr sz="1100" b="0">
+                <a:solidFill>
+                  <a:srgbClr val="0F172A"/>
+                </a:solidFill>
+                <a:latin typeface="Microsoft YaHei"/>
+              </a:rPr>
+              <a:t>严格以第一性原理和实测数据为依据，建立阶段性客观验证标准，杜绝纸面假定。</a:t>
             </a:r>
           </a:p>
         </p:txBody>
@@ -4818,8 +4856,8 @@
         </p:nvSpPr>
         <p:spPr>
           <a:xfrm>
-            <a:off x="466344" y="4672583"/>
-            <a:ext cx="5422392" cy="1865375"/>
+            <a:off x="466344" y="4654295"/>
+            <a:ext cx="5422392" cy="1901951"/>
           </a:xfrm>
           <a:prstGeom prst="rect">
             <a:avLst/>
@@ -4845,14 +4883,14 @@
           <a:p>
             <a:pPr>
               <a:lnSpc>
-                <a:spcPct val="120000"/>
+                <a:spcPct val="118000"/>
               </a:lnSpc>
               <a:spcBef>
-                <a:spcPts val="600"/>
+                <a:spcPts val="400"/>
               </a:spcBef>
             </a:pPr>
             <a:r>
-              <a:rPr sz="1150" b="1">
+              <a:rPr sz="1100" b="1">
                 <a:solidFill>
                   <a:srgbClr val="047857"/>
                 </a:solidFill>
@@ -4861,7 +4899,7 @@
               <a:t>• URMA 元数据改造：</a:t>
             </a:r>
             <a:r>
-              <a:rPr sz="1150" b="0">
+              <a:rPr sz="1100" b="0">
                 <a:solidFill>
                   <a:srgbClr val="0F172A"/>
                 </a:solidFill>
@@ -4871,7 +4909,7 @@
 </a:t>
             </a:r>
             <a:r>
-              <a:rPr sz="1150" b="1">
+              <a:rPr sz="1100" b="1">
                 <a:solidFill>
                   <a:srgbClr val="047857"/>
                 </a:solidFill>
@@ -4880,13 +4918,32 @@
               <a:t>• 收益上限摸底：</a:t>
             </a:r>
             <a:r>
-              <a:rPr sz="1150" b="0">
+              <a:rPr sz="1100" b="0">
                 <a:solidFill>
                   <a:srgbClr val="0F172A"/>
                 </a:solidFill>
                 <a:latin typeface="Microsoft YaHei"/>
               </a:rPr>
-              <a:t>针对 72B 与 8B 双模型，在 30%~98% 前缀复用率下采集原生耗时与 Saved-Prefill 收益上限（数据已占位就绪）。</a:t>
+              <a:t>针对 72B 与 8B 双模型，在 30%~98% 前缀复用率下采集原生耗时与 Saved-Prefill 收益上限（数据已占位就绪）；
+</a:t>
+            </a:r>
+            <a:r>
+              <a:rPr sz="1100" b="1">
+                <a:solidFill>
+                  <a:srgbClr val="047857"/>
+                </a:solidFill>
+                <a:latin typeface="Microsoft YaHei"/>
+              </a:rPr>
+              <a:t>• 决策标尺建立：</a:t>
+            </a:r>
+            <a:r>
+              <a:rPr sz="1100" b="0">
+                <a:solidFill>
+                  <a:srgbClr val="0F172A"/>
+                </a:solidFill>
+                <a:latin typeface="Microsoft YaHei"/>
+              </a:rPr>
+              <a:t>通过实测数据摸清重算 vs 传输平衡临界点，为微秒级 QueryPlan 调度算法提供物理标尺。</a:t>
             </a:r>
           </a:p>
         </p:txBody>
@@ -4987,8 +5044,8 @@
         </p:nvSpPr>
         <p:spPr>
           <a:xfrm>
-            <a:off x="6327648" y="4672583"/>
-            <a:ext cx="5422392" cy="1865375"/>
+            <a:off x="6327648" y="4654295"/>
+            <a:ext cx="5422392" cy="1901951"/>
           </a:xfrm>
           <a:prstGeom prst="rect">
             <a:avLst/>
@@ -5014,14 +5071,14 @@
           <a:p>
             <a:pPr>
               <a:lnSpc>
-                <a:spcPct val="120000"/>
+                <a:spcPct val="118000"/>
               </a:lnSpc>
               <a:spcBef>
-                <a:spcPts val="600"/>
+                <a:spcPts val="400"/>
               </a:spcBef>
             </a:pPr>
             <a:r>
-              <a:rPr sz="1150" b="1">
+              <a:rPr sz="1100" b="1">
                 <a:solidFill>
                   <a:srgbClr val="1E3A8A"/>
                 </a:solidFill>
@@ -5030,7 +5087,7 @@
               <a:t>• 需求映射校准：</a:t>
             </a:r>
             <a:r>
-              <a:rPr sz="1150" b="0">
+              <a:rPr sz="1100" b="0">
                 <a:solidFill>
                   <a:srgbClr val="0F172A"/>
                 </a:solidFill>
@@ -5040,7 +5097,7 @@
 </a:t>
             </a:r>
             <a:r>
-              <a:rPr sz="1150" b="1">
+              <a:rPr sz="1100" b="1">
                 <a:solidFill>
                   <a:srgbClr val="1E3A8A"/>
                 </a:solidFill>
@@ -5049,13 +5106,32 @@
               <a:t>• 总体框图刷新：</a:t>
             </a:r>
             <a:r>
-              <a:rPr sz="1150" b="0">
+              <a:rPr sz="1100" b="0">
                 <a:solidFill>
                   <a:srgbClr val="0F172A"/>
                 </a:solidFill>
                 <a:latin typeface="Microsoft YaHei"/>
               </a:rPr>
-              <a:t>重新编译生成《项目 SR 需求关系关联架构图》，实现从顶层框架适配到最底层物理传输底座的严密逻辑贯通。</a:t>
+              <a:t>重新编译生成《项目 SR 需求关系关联架构图》，实现从顶层框架适配到最底层物理传输底座的严密逻辑贯通；
+</a:t>
+            </a:r>
+            <a:r>
+              <a:rPr sz="1100" b="1">
+                <a:solidFill>
+                  <a:srgbClr val="1E3A8A"/>
+                </a:solidFill>
+                <a:latin typeface="Microsoft YaHei"/>
+              </a:rPr>
+              <a:t>• 闭包覆盖完整：</a:t>
+            </a:r>
+            <a:r>
+              <a:rPr sz="1100" b="0">
+                <a:solidFill>
+                  <a:srgbClr val="0F172A"/>
+                </a:solidFill>
+                <a:latin typeface="Microsoft YaHei"/>
+              </a:rPr>
+              <a:t>全面覆盖统一对象池、分层扩容、微秒调度、语义校验与观测工具链 5 大功能域。</a:t>
             </a:r>
           </a:p>
         </p:txBody>
@@ -5278,7 +5354,7 @@
           <a:p>
             <a:pPr>
               <a:spcBef>
-                <a:spcPts val="600"/>
+                <a:spcPts val="1000"/>
               </a:spcBef>
             </a:pPr>
             <a:r>
@@ -5297,7 +5373,7 @@
                 <a:spcPct val="120000"/>
               </a:lnSpc>
               <a:spcBef>
-                <a:spcPts val="300"/>
+                <a:spcPts val="400"/>
               </a:spcBef>
             </a:pPr>
             <a:r>
@@ -5307,7 +5383,7 @@
                 </a:solidFill>
                 <a:latin typeface="Microsoft YaHei"/>
               </a:rPr>
-              <a:t>消除从头自研的立项阻力，将主要攻坚方向明确为“通用开源在国产专用硬件下的底层性能瓶颈”。
+              <a:t>消除从头自研的立项阻力，将主要攻坚方向明确为“通用开源在国产专用硬件下的底层性能瓶颈与软硬件协同优化”。
 </a:t>
             </a:r>
             <a:r>
@@ -5323,7 +5399,7 @@
           <a:p>
             <a:pPr>
               <a:spcBef>
-                <a:spcPts val="600"/>
+                <a:spcPts val="1000"/>
               </a:spcBef>
             </a:pPr>
             <a:r>
@@ -5342,7 +5418,7 @@
                 <a:spcPct val="120000"/>
               </a:lnSpc>
               <a:spcBef>
-                <a:spcPts val="300"/>
+                <a:spcPts val="400"/>
               </a:spcBef>
             </a:pPr>
             <a:r>
@@ -5352,7 +5428,7 @@
                 </a:solidFill>
                 <a:latin typeface="Microsoft YaHei"/>
               </a:rPr>
-              <a:t>建立客观技术对标基准，将原有自研需求全量转化为对开源短板的针对性补强。
+              <a:t>建立客观技术对标基准，将原有自研需求全量转化为对开源短板的针对性补强，形成清晰的技术增量价值。
 </a:t>
             </a:r>
             <a:r>
@@ -5368,7 +5444,7 @@
           <a:p>
             <a:pPr>
               <a:spcBef>
-                <a:spcPts val="600"/>
+                <a:spcPts val="1000"/>
               </a:spcBef>
             </a:pPr>
             <a:r>
@@ -5387,7 +5463,7 @@
                 <a:spcPct val="120000"/>
               </a:lnSpc>
               <a:spcBef>
-                <a:spcPts val="300"/>
+                <a:spcPts val="400"/>
               </a:spcBef>
             </a:pPr>
             <a:r>
@@ -5397,7 +5473,7 @@
                 </a:solidFill>
                 <a:latin typeface="Microsoft YaHei"/>
               </a:rPr>
-              <a:t>赋予研发团队底层重构自由度，支持深入通信驱动、调度算法与内存布局进行内核级深度重构。
+              <a:t>赋予研发团队底层重构自由度，支持深入通信驱动、调度算法与多级存储布局进行内核级深度重构。
 </a:t>
             </a:r>
             <a:r>
@@ -5407,7 +5483,7 @@
                 </a:solidFill>
                 <a:latin typeface="Microsoft YaHei"/>
               </a:rPr>
-              <a:t>[落实] 确立“外层兼容、内核重构”原则，对外兼容主流接口，对内重构核心链路。</a:t>
+              <a:t>[落实] 确立“外层兼容、内核重构”原则，对外兼容主流生态接口，对内重构核心链路。</a:t>
             </a:r>
           </a:p>
         </p:txBody>
@@ -5907,8 +5983,8 @@
         </p:nvSpPr>
         <p:spPr>
           <a:xfrm>
-            <a:off x="320040" y="1078992"/>
-            <a:ext cx="2752344" cy="2542032"/>
+            <a:off x="365760" y="1078992"/>
+            <a:ext cx="2770632" cy="2542032"/>
           </a:xfrm>
           <a:prstGeom prst="rect">
             <a:avLst/>
@@ -5952,8 +6028,8 @@
         </p:nvSpPr>
         <p:spPr>
           <a:xfrm>
-            <a:off x="411480" y="1133856"/>
-            <a:ext cx="2569464" cy="2432304"/>
+            <a:off x="475488" y="1152144"/>
+            <a:ext cx="2551176" cy="2395728"/>
           </a:xfrm>
           <a:prstGeom prst="rect">
             <a:avLst/>
@@ -5986,7 +6062,7 @@
               </a:spcAft>
             </a:pPr>
             <a:r>
-              <a:rPr sz="880">
+              <a:rPr sz="900">
                 <a:solidFill>
                   <a:srgbClr val="475569"/>
                 </a:solidFill>
@@ -5998,14 +6074,14 @@
           <a:p>
             <a:pPr>
               <a:lnSpc>
-                <a:spcPct val="114000"/>
+                <a:spcPct val="118000"/>
               </a:lnSpc>
               <a:spcBef>
-                <a:spcPts val="200"/>
+                <a:spcPts val="300"/>
               </a:spcBef>
             </a:pPr>
             <a:r>
-              <a:rPr sz="880" b="1">
+              <a:rPr sz="1000" b="1">
                 <a:solidFill>
                   <a:srgbClr val="0F172A"/>
                 </a:solidFill>
@@ -6015,7 +6091,7 @@
 </a:t>
             </a:r>
             <a:r>
-              <a:rPr sz="850">
+              <a:rPr sz="1000">
                 <a:solidFill>
                   <a:srgbClr val="475569"/>
                 </a:solidFill>
@@ -6027,14 +6103,14 @@
           <a:p>
             <a:pPr>
               <a:lnSpc>
-                <a:spcPct val="114000"/>
+                <a:spcPct val="118000"/>
               </a:lnSpc>
               <a:spcBef>
-                <a:spcPts val="200"/>
+                <a:spcPts val="300"/>
               </a:spcBef>
             </a:pPr>
             <a:r>
-              <a:rPr sz="880" b="1">
+              <a:rPr sz="1000" b="1">
                 <a:solidFill>
                   <a:srgbClr val="BE123C"/>
                 </a:solidFill>
@@ -6044,14 +6120,14 @@
 </a:t>
             </a:r>
             <a:r>
-              <a:rPr sz="850">
+              <a:rPr sz="1000">
                 <a:solidFill>
                   <a:srgbClr val="475569"/>
                 </a:solidFill>
                 <a:latin typeface="Microsoft YaHei"/>
               </a:rPr>
-              <a:t>① 显存易触顶：生命周期绑定单机进程，缺跨机存储与分层治理，超限直接触发淘汰重算
-② 缺分布式传输：PD 分离场景依赖基础 TCP/RPC 传输，无硬件零拷贝通路，传输延时远超重算</a:t>
+              <a:t>① 显存易触顶：生命周期绑定单机进程，缺跨机分层治理，超限直接触发淘汰重算
+② 缺分布式传输：PD 分离依赖 CPU TCP 传输，无硬件零拷贝，时延远超重算</a:t>
             </a:r>
           </a:p>
         </p:txBody>
@@ -6065,7 +6141,7 @@
         <p:spPr>
           <a:xfrm>
             <a:off x="3255264" y="1078992"/>
-            <a:ext cx="2752344" cy="2542032"/>
+            <a:ext cx="2770632" cy="2542032"/>
           </a:xfrm>
           <a:prstGeom prst="rect">
             <a:avLst/>
@@ -6109,8 +6185,8 @@
         </p:nvSpPr>
         <p:spPr>
           <a:xfrm>
-            <a:off x="3346704" y="1133856"/>
-            <a:ext cx="2569464" cy="2432304"/>
+            <a:off x="3364992" y="1152144"/>
+            <a:ext cx="2551176" cy="2395728"/>
           </a:xfrm>
           <a:prstGeom prst="rect">
             <a:avLst/>
@@ -6143,7 +6219,7 @@
               </a:spcAft>
             </a:pPr>
             <a:r>
-              <a:rPr sz="880">
+              <a:rPr sz="900">
                 <a:solidFill>
                   <a:srgbClr val="475569"/>
                 </a:solidFill>
@@ -6155,14 +6231,14 @@
           <a:p>
             <a:pPr>
               <a:lnSpc>
-                <a:spcPct val="114000"/>
+                <a:spcPct val="118000"/>
               </a:lnSpc>
               <a:spcBef>
-                <a:spcPts val="200"/>
+                <a:spcPts val="300"/>
               </a:spcBef>
             </a:pPr>
             <a:r>
-              <a:rPr sz="880" b="1">
+              <a:rPr sz="1000" b="1">
                 <a:solidFill>
                   <a:srgbClr val="0F172A"/>
                 </a:solidFill>
@@ -6172,7 +6248,7 @@
 </a:t>
             </a:r>
             <a:r>
-              <a:rPr sz="850">
+              <a:rPr sz="1000">
                 <a:solidFill>
                   <a:srgbClr val="475569"/>
                 </a:solidFill>
@@ -6184,14 +6260,14 @@
           <a:p>
             <a:pPr>
               <a:lnSpc>
-                <a:spcPct val="114000"/>
+                <a:spcPct val="118000"/>
               </a:lnSpc>
               <a:spcBef>
-                <a:spcPts val="200"/>
+                <a:spcPts val="300"/>
               </a:spcBef>
             </a:pPr>
             <a:r>
-              <a:rPr sz="880" b="1">
+              <a:rPr sz="1000" b="1">
                 <a:solidFill>
                   <a:srgbClr val="BE123C"/>
                 </a:solidFill>
@@ -6201,14 +6277,14 @@
 </a:t>
             </a:r>
             <a:r>
-              <a:rPr sz="850">
+              <a:rPr sz="1000">
                 <a:solidFill>
                   <a:srgbClr val="475569"/>
                 </a:solidFill>
                 <a:latin typeface="Microsoft YaHei"/>
               </a:rPr>
-              <a:t>① 控制面开销大：纯 Python 跨进程 IPC 与运行时解释器开销大，难以满足微秒级高并发匹配
-② 吞吐受制 CPU Wall：严重依赖 Host CPU 做量化与 CRC 校验，高并发下 CPU 打满成数据面瓶颈</a:t>
+              <a:t>① 控制面开销大：纯 Python 跨进程 IPC 开销大，难以满足微秒级高并发匹配
+② 吞吐受制 CPU Wall：严重依赖 CPU 做量化与 CRC 校验，高并发下 CPU 打满成瓶颈</a:t>
             </a:r>
           </a:p>
         </p:txBody>
@@ -6221,8 +6297,8 @@
         </p:nvSpPr>
         <p:spPr>
           <a:xfrm>
-            <a:off x="6190488" y="1078992"/>
-            <a:ext cx="2752344" cy="2542032"/>
+            <a:off x="6144768" y="1078992"/>
+            <a:ext cx="2770632" cy="2542032"/>
           </a:xfrm>
           <a:prstGeom prst="rect">
             <a:avLst/>
@@ -6266,8 +6342,8 @@
         </p:nvSpPr>
         <p:spPr>
           <a:xfrm>
-            <a:off x="6281928" y="1133856"/>
-            <a:ext cx="2569464" cy="2432304"/>
+            <a:off x="6254496" y="1152144"/>
+            <a:ext cx="2551176" cy="2395728"/>
           </a:xfrm>
           <a:prstGeom prst="rect">
             <a:avLst/>
@@ -6300,7 +6376,7 @@
               </a:spcAft>
             </a:pPr>
             <a:r>
-              <a:rPr sz="880">
+              <a:rPr sz="900">
                 <a:solidFill>
                   <a:srgbClr val="475569"/>
                 </a:solidFill>
@@ -6312,14 +6388,14 @@
           <a:p>
             <a:pPr>
               <a:lnSpc>
-                <a:spcPct val="114000"/>
+                <a:spcPct val="118000"/>
               </a:lnSpc>
               <a:spcBef>
-                <a:spcPts val="200"/>
+                <a:spcPts val="300"/>
               </a:spcBef>
             </a:pPr>
             <a:r>
-              <a:rPr sz="880" b="1">
+              <a:rPr sz="1000" b="1">
                 <a:solidFill>
                   <a:srgbClr val="0F172A"/>
                 </a:solidFill>
@@ -6329,7 +6405,7 @@
 </a:t>
             </a:r>
             <a:r>
-              <a:rPr sz="850">
+              <a:rPr sz="1000">
                 <a:solidFill>
                   <a:srgbClr val="475569"/>
                 </a:solidFill>
@@ -6341,14 +6417,14 @@
           <a:p>
             <a:pPr>
               <a:lnSpc>
-                <a:spcPct val="114000"/>
+                <a:spcPct val="118000"/>
               </a:lnSpc>
               <a:spcBef>
-                <a:spcPts val="200"/>
+                <a:spcPts val="300"/>
               </a:spcBef>
             </a:pPr>
             <a:r>
-              <a:rPr sz="880" b="1">
+              <a:rPr sz="1000" b="1">
                 <a:solidFill>
                   <a:srgbClr val="BE123C"/>
                 </a:solidFill>
@@ -6358,14 +6434,14 @@
 </a:t>
             </a:r>
             <a:r>
-              <a:rPr sz="850">
+              <a:rPr sz="1000">
                 <a:solidFill>
                   <a:srgbClr val="475569"/>
                 </a:solidFill>
                 <a:latin typeface="Microsoft YaHei"/>
               </a:rPr>
-              <a:t>① 阻塞 Layer 0：64KB 无语义切片并发打散 Transformer 层序，导致首包阻塞与 Incast 丢包
-② 固定中转与缺多卡同步：依赖 DDR 二级中转带来 CPU 拷贝开销；TP=8 各卡独立拉取易诱发死锁</a:t>
+              <a:t>① 阻塞 Layer 0：64KB 无语义切片并发打散层序，导致首包阻塞与 Incast 丢包
+② 固定中转与缺多卡同步：依赖 DDR 二级中转开销大；TP=8 各卡独立拉取易诱发死锁</a:t>
             </a:r>
           </a:p>
         </p:txBody>
@@ -6378,8 +6454,8 @@
         </p:nvSpPr>
         <p:spPr>
           <a:xfrm>
-            <a:off x="9125712" y="1078992"/>
-            <a:ext cx="2752344" cy="2542032"/>
+            <a:off x="9034272" y="1078992"/>
+            <a:ext cx="2770632" cy="2542032"/>
           </a:xfrm>
           <a:prstGeom prst="rect">
             <a:avLst/>
@@ -6423,8 +6499,8 @@
         </p:nvSpPr>
         <p:spPr>
           <a:xfrm>
-            <a:off x="9217152" y="1133856"/>
-            <a:ext cx="2569464" cy="2432304"/>
+            <a:off x="9144000" y="1152144"/>
+            <a:ext cx="2551176" cy="2395728"/>
           </a:xfrm>
           <a:prstGeom prst="rect">
             <a:avLst/>
@@ -6457,7 +6533,7 @@
               </a:spcAft>
             </a:pPr>
             <a:r>
-              <a:rPr sz="880">
+              <a:rPr sz="900">
                 <a:solidFill>
                   <a:srgbClr val="475569"/>
                 </a:solidFill>
@@ -6469,14 +6545,14 @@
           <a:p>
             <a:pPr>
               <a:lnSpc>
-                <a:spcPct val="114000"/>
+                <a:spcPct val="118000"/>
               </a:lnSpc>
               <a:spcBef>
-                <a:spcPts val="200"/>
+                <a:spcPts val="300"/>
               </a:spcBef>
             </a:pPr>
             <a:r>
-              <a:rPr sz="880" b="1">
+              <a:rPr sz="1000" b="1">
                 <a:solidFill>
                   <a:srgbClr val="0F172A"/>
                 </a:solidFill>
@@ -6486,26 +6562,26 @@
 </a:t>
             </a:r>
             <a:r>
-              <a:rPr sz="850">
+              <a:rPr sz="1000">
                 <a:solidFill>
                   <a:srgbClr val="475569"/>
                 </a:solidFill>
                 <a:latin typeface="Microsoft YaHei"/>
               </a:rPr>
-              <a:t>基于开源底座深度重构 + 原厂软硬件内核增强</a:t>
+              <a:t>开源底座深度重构 + 原厂软硬件内核级增强</a:t>
             </a:r>
           </a:p>
           <a:p>
             <a:pPr>
               <a:lnSpc>
-                <a:spcPct val="114000"/>
+                <a:spcPct val="118000"/>
               </a:lnSpc>
               <a:spcBef>
-                <a:spcPts val="200"/>
+                <a:spcPts val="300"/>
               </a:spcBef>
             </a:pPr>
             <a:r>
-              <a:rPr sz="880" b="1">
+              <a:rPr sz="1000" b="1">
                 <a:solidFill>
                   <a:srgbClr val="1E3A8A"/>
                 </a:solidFill>
@@ -6515,14 +6591,14 @@
 </a:t>
             </a:r>
             <a:r>
-              <a:rPr sz="850">
+              <a:rPr sz="1000">
                 <a:solidFill>
                   <a:srgbClr val="1E3A8A"/>
                 </a:solidFill>
                 <a:latin typeface="Microsoft YaHei"/>
               </a:rPr>
-              <a:t>① 软硬双擎极速通路：UBMEM 共享总线微秒级元数据原子感知，URMA 硬件零拷贝 (Host 触碰为 0)
-② 容量主路径与防死锁：HBM↔SSD 裸盘直达扩容 ≥30%；QueryPlan 动态决策避负收益；TP 多卡同步杜绝死锁</a:t>
+              <a:t>① 软硬双擎极速通路：UBMEM 微秒元数据感知，URMA 硬件零拷贝 (CPU 零拷贝)
+② 容量主路径与防死锁：HBM↔SSD 直达扩容 ≥30%；微秒选路避负收益；TP 多卡同步防死锁</a:t>
             </a:r>
           </a:p>
         </p:txBody>
@@ -6535,8 +6611,8 @@
         </p:nvSpPr>
         <p:spPr>
           <a:xfrm>
-            <a:off x="320040" y="3730752"/>
-            <a:ext cx="2752344" cy="2816352"/>
+            <a:off x="365760" y="3730752"/>
+            <a:ext cx="2770632" cy="2852928"/>
           </a:xfrm>
           <a:prstGeom prst="rect">
             <a:avLst/>
@@ -6580,8 +6656,8 @@
         </p:nvSpPr>
         <p:spPr>
           <a:xfrm>
-            <a:off x="411480" y="3785616"/>
-            <a:ext cx="2569464" cy="2706624"/>
+            <a:off x="475488" y="3803904"/>
+            <a:ext cx="2551176" cy="2706624"/>
           </a:xfrm>
           <a:prstGeom prst="rect">
             <a:avLst/>
@@ -6610,11 +6686,11 @@
                 <a:spcPts val="100"/>
               </a:spcBef>
               <a:spcAft>
-                <a:spcPts val="200"/>
+                <a:spcPts val="400"/>
               </a:spcAft>
             </a:pPr>
             <a:r>
-              <a:rPr sz="860" b="1">
+              <a:rPr sz="900" b="1">
                 <a:solidFill>
                   <a:srgbClr val="047857"/>
                 </a:solidFill>
@@ -6626,11 +6702,14 @@
           <a:p>
             <a:pPr>
               <a:lnSpc>
-                <a:spcPct val="115000"/>
+                <a:spcPct val="118000"/>
               </a:lnSpc>
-            </a:pPr>
-            <a:r>
-              <a:rPr sz="880" b="1">
+              <a:spcBef>
+                <a:spcPts val="700"/>
+              </a:spcBef>
+            </a:pPr>
+            <a:r>
+              <a:rPr sz="1000" b="1">
                 <a:solidFill>
                   <a:srgbClr val="047857"/>
                 </a:solidFill>
@@ -6639,17 +6718,26 @@
               <a:t>• 验证目标与认知：</a:t>
             </a:r>
             <a:r>
-              <a:rPr sz="880" b="0">
+              <a:rPr sz="1000">
                 <a:solidFill>
                   <a:srgbClr val="0F172A"/>
                 </a:solidFill>
                 <a:latin typeface="Microsoft YaHei"/>
               </a:rPr>
-              <a:t>在真实国产硬件与网络下测定净收益物理边界，探明“重算 vs 传输”平衡临界点；
-</a:t>
-            </a:r>
-            <a:r>
-              <a:rPr sz="880" b="1">
+              <a:t>在真实国产硬件与网络下测定净收益物理边界，探明“重算 vs 传输”平衡临界点；</a:t>
+            </a:r>
+          </a:p>
+          <a:p>
+            <a:pPr>
+              <a:lnSpc>
+                <a:spcPct val="118000"/>
+              </a:lnSpc>
+              <a:spcBef>
+                <a:spcPts val="700"/>
+              </a:spcBef>
+            </a:pPr>
+            <a:r>
+              <a:rPr sz="1000" b="1">
                 <a:solidFill>
                   <a:srgbClr val="1E3A8A"/>
                 </a:solidFill>
@@ -6658,17 +6746,26 @@
               <a:t>• PVT-00 攻关内容：</a:t>
             </a:r>
             <a:r>
-              <a:rPr sz="880" b="0">
+              <a:rPr sz="1000">
                 <a:solidFill>
                   <a:srgbClr val="475569"/>
                 </a:solidFill>
                 <a:latin typeface="Microsoft YaHei"/>
               </a:rPr>
-              <a:t>72B/8B 双模型 5 档复用率 (30%~98%) 延时对比实测 [已具备部分数据]；
-</a:t>
-            </a:r>
-            <a:r>
-              <a:rPr sz="880" b="1">
+              <a:t>72B/8B 双模型 5 档复用率 (30%~98%) 延时对比实测 [已具备部分数据]；</a:t>
+            </a:r>
+          </a:p>
+          <a:p>
+            <a:pPr>
+              <a:lnSpc>
+                <a:spcPct val="118000"/>
+              </a:lnSpc>
+              <a:spcBef>
+                <a:spcPts val="700"/>
+              </a:spcBef>
+            </a:pPr>
+            <a:r>
+              <a:rPr sz="1000" b="1">
                 <a:solidFill>
                   <a:srgbClr val="047857"/>
                 </a:solidFill>
@@ -6677,7 +6774,7 @@
               <a:t>• 竞争力贡献与效果：</a:t>
             </a:r>
             <a:r>
-              <a:rPr sz="880" b="0">
+              <a:rPr sz="1000">
                 <a:solidFill>
                   <a:srgbClr val="0F172A"/>
                 </a:solidFill>
@@ -6697,7 +6794,7 @@
         <p:spPr>
           <a:xfrm>
             <a:off x="3255264" y="3730752"/>
-            <a:ext cx="2752344" cy="2816352"/>
+            <a:ext cx="2770632" cy="2852928"/>
           </a:xfrm>
           <a:prstGeom prst="rect">
             <a:avLst/>
@@ -6741,8 +6838,8 @@
         </p:nvSpPr>
         <p:spPr>
           <a:xfrm>
-            <a:off x="3346704" y="3785616"/>
-            <a:ext cx="2569464" cy="2706624"/>
+            <a:off x="3364992" y="3803904"/>
+            <a:ext cx="2551176" cy="2706624"/>
           </a:xfrm>
           <a:prstGeom prst="rect">
             <a:avLst/>
@@ -6771,27 +6868,30 @@
                 <a:spcPts val="100"/>
               </a:spcBef>
               <a:spcAft>
-                <a:spcPts val="200"/>
+                <a:spcPts val="400"/>
               </a:spcAft>
             </a:pPr>
             <a:r>
-              <a:rPr sz="860" b="1">
+              <a:rPr sz="900" b="1">
                 <a:solidFill>
                   <a:srgbClr val="1E3A8A"/>
                 </a:solidFill>
                 <a:latin typeface="Microsoft YaHei"/>
               </a:rPr>
-              <a:t>[支撑竞争力: 微秒控制面与零 CPU 负载极速数据面]</a:t>
+              <a:t>[支撑竞争力: 微秒控制面与零负载极速数据面]</a:t>
             </a:r>
           </a:p>
           <a:p>
             <a:pPr>
               <a:lnSpc>
-                <a:spcPct val="115000"/>
+                <a:spcPct val="118000"/>
               </a:lnSpc>
-            </a:pPr>
-            <a:r>
-              <a:rPr sz="880" b="1">
+              <a:spcBef>
+                <a:spcPts val="700"/>
+              </a:spcBef>
+            </a:pPr>
+            <a:r>
+              <a:rPr sz="1000" b="1">
                 <a:solidFill>
                   <a:srgbClr val="1D4ED8"/>
                 </a:solidFill>
@@ -6800,17 +6900,26 @@
               <a:t>• 验证目标与认知：</a:t>
             </a:r>
             <a:r>
-              <a:rPr sz="880" b="0">
+              <a:rPr sz="1000">
                 <a:solidFill>
                   <a:srgbClr val="0F172A"/>
                 </a:solidFill>
                 <a:latin typeface="Microsoft YaHei"/>
               </a:rPr>
-              <a:t>融合 UBMEM 微秒元数据感知与 URMA 零拷贝正文传输，彻底打破 CPU 瓶颈；
-</a:t>
-            </a:r>
-            <a:r>
-              <a:rPr sz="880" b="1">
+              <a:t>融合 UBMEM 微秒元数据感知与 URMA 零拷贝正文传输，彻底打破 CPU 瓶颈；</a:t>
+            </a:r>
+          </a:p>
+          <a:p>
+            <a:pPr>
+              <a:lnSpc>
+                <a:spcPct val="118000"/>
+              </a:lnSpc>
+              <a:spcBef>
+                <a:spcPts val="700"/>
+              </a:spcBef>
+            </a:pPr>
+            <a:r>
+              <a:rPr sz="1000" b="1">
                 <a:solidFill>
                   <a:srgbClr val="1E3A8A"/>
                 </a:solidFill>
@@ -6819,17 +6928,26 @@
               <a:t>• PVT-01/02/06 攻关：</a:t>
             </a:r>
             <a:r>
-              <a:rPr sz="880" b="0">
+              <a:rPr sz="1000">
                 <a:solidFill>
                   <a:srgbClr val="475569"/>
                 </a:solidFill>
                 <a:latin typeface="Microsoft YaHei"/>
               </a:rPr>
-              <a:t>P2P 零拷贝基线 [已备部分数据] + 描述符批量编译 + TP=8 多卡同步；
-</a:t>
-            </a:r>
-            <a:r>
-              <a:rPr sz="880" b="1">
+              <a:t>P2P 零拷贝基线 [已备部分数据] + 描述符批量编译 + TP=8 多卡同步；</a:t>
+            </a:r>
+          </a:p>
+          <a:p>
+            <a:pPr>
+              <a:lnSpc>
+                <a:spcPct val="118000"/>
+              </a:lnSpc>
+              <a:spcBef>
+                <a:spcPts val="700"/>
+              </a:spcBef>
+            </a:pPr>
+            <a:r>
+              <a:rPr sz="1000" b="1">
                 <a:solidFill>
                   <a:srgbClr val="1D4ED8"/>
                 </a:solidFill>
@@ -6838,13 +6956,13 @@
               <a:t>• 竞争力贡献与效果：</a:t>
             </a:r>
             <a:r>
-              <a:rPr sz="880" b="0">
+              <a:rPr sz="1000">
                 <a:solidFill>
                   <a:srgbClr val="0F172A"/>
                 </a:solidFill>
                 <a:latin typeface="Microsoft YaHei"/>
               </a:rPr>
-              <a:t>Host CPU 触碰严格为 0，释放 CPU 算力，微秒级提交，杜绝 TP=8 多卡通信死锁。</a:t>
+              <a:t>Host CPU 零数据拷贝释放 CPU 算力，微秒级提交杜绝 TP=8 多卡通信死锁。</a:t>
             </a:r>
           </a:p>
         </p:txBody>
@@ -6857,8 +6975,8 @@
         </p:nvSpPr>
         <p:spPr>
           <a:xfrm>
-            <a:off x="6190488" y="3730752"/>
-            <a:ext cx="2752344" cy="2816352"/>
+            <a:off x="6144768" y="3730752"/>
+            <a:ext cx="2770632" cy="2852928"/>
           </a:xfrm>
           <a:prstGeom prst="rect">
             <a:avLst/>
@@ -6902,8 +7020,8 @@
         </p:nvSpPr>
         <p:spPr>
           <a:xfrm>
-            <a:off x="6281928" y="3785616"/>
-            <a:ext cx="2569464" cy="2706624"/>
+            <a:off x="6254496" y="3803904"/>
+            <a:ext cx="2551176" cy="2706624"/>
           </a:xfrm>
           <a:prstGeom prst="rect">
             <a:avLst/>
@@ -6932,27 +7050,30 @@
                 <a:spcPts val="100"/>
               </a:spcBef>
               <a:spcAft>
-                <a:spcPts val="200"/>
+                <a:spcPts val="400"/>
               </a:spcAft>
             </a:pPr>
             <a:r>
-              <a:rPr sz="860" b="1">
+              <a:rPr sz="900" b="1">
                 <a:solidFill>
                   <a:srgbClr val="1E3A8A"/>
                 </a:solidFill>
                 <a:latin typeface="Microsoft YaHei"/>
               </a:rPr>
-              <a:t>[支撑竞争力: 显存扩容 ≥30% 与零负收益动态兜底]</a:t>
+              <a:t>[支撑竞争力: 显存扩容 ≥30% 与零负收益兜底]</a:t>
             </a:r>
           </a:p>
           <a:p>
             <a:pPr>
               <a:lnSpc>
-                <a:spcPct val="115000"/>
+                <a:spcPct val="118000"/>
               </a:lnSpc>
-            </a:pPr>
-            <a:r>
-              <a:rPr sz="880" b="1">
+              <a:spcBef>
+                <a:spcPts val="700"/>
+              </a:spcBef>
+            </a:pPr>
+            <a:r>
+              <a:rPr sz="1000" b="1">
                 <a:solidFill>
                   <a:srgbClr val="1D4ED8"/>
                 </a:solidFill>
@@ -6961,17 +7082,26 @@
               <a:t>• 验证目标与认知：</a:t>
             </a:r>
             <a:r>
-              <a:rPr sz="880" b="0">
+              <a:rPr sz="1000">
                 <a:solidFill>
                   <a:srgbClr val="0F172A"/>
                 </a:solidFill>
                 <a:latin typeface="Microsoft YaHei"/>
               </a:rPr>
-              <a:t>建立 HBM↔SSD 直达容量主路径，并基于微秒级算力/网络比对实现智能避坑；
-</a:t>
-            </a:r>
-            <a:r>
-              <a:rPr sz="880" b="1">
+              <a:t>建立 HBM↔SSD 直达容量主路径，并基于微秒级算力/网络比对实现智能避坑；</a:t>
+            </a:r>
+          </a:p>
+          <a:p>
+            <a:pPr>
+              <a:lnSpc>
+                <a:spcPct val="118000"/>
+              </a:lnSpc>
+              <a:spcBef>
+                <a:spcPts val="700"/>
+              </a:spcBef>
+            </a:pPr>
+            <a:r>
+              <a:rPr sz="1000" b="1">
                 <a:solidFill>
                   <a:srgbClr val="1E3A8A"/>
                 </a:solidFill>
@@ -6980,17 +7110,26 @@
               <a:t>• PVT-03/04/05 攻关：</a:t>
             </a:r>
             <a:r>
-              <a:rPr sz="880" b="0">
+              <a:rPr sz="1000">
                 <a:solidFill>
                   <a:srgbClr val="475569"/>
                 </a:solidFill>
                 <a:latin typeface="Microsoft YaHei"/>
               </a:rPr>
-              <a:t>Direct-View 边界验证与 ViewGuard 容错 + QueryPlan 成本决策 + SSD 裸盘直达；
-</a:t>
-            </a:r>
-            <a:r>
-              <a:rPr sz="880" b="1">
+              <a:t>Direct-View 边界验证与 ViewGuard 容错 + QueryPlan 成本决策 + SSD 直达；</a:t>
+            </a:r>
+          </a:p>
+          <a:p>
+            <a:pPr>
+              <a:lnSpc>
+                <a:spcPct val="118000"/>
+              </a:lnSpc>
+              <a:spcBef>
+                <a:spcPts val="700"/>
+              </a:spcBef>
+            </a:pPr>
+            <a:r>
+              <a:rPr sz="1000" b="1">
                 <a:solidFill>
                   <a:srgbClr val="1D4ED8"/>
                 </a:solidFill>
@@ -6999,13 +7138,13 @@
               <a:t>• 竞争力贡献与效果：</a:t>
             </a:r>
             <a:r>
-              <a:rPr sz="880" b="0">
+              <a:rPr sz="1000">
                 <a:solidFill>
                   <a:srgbClr val="0F172A"/>
                 </a:solidFill>
                 <a:latin typeface="Microsoft YaHei"/>
               </a:rPr>
-              <a:t>廉价 SSD 扩容 ≥30% 降 TCO，网络拥塞时主动回退重算杜绝性能反噬。</a:t>
+              <a:t>低成本 SSD 扩容 ≥30% 降 TCO，网络拥塞时主动回退重算杜绝性能反噬。</a:t>
             </a:r>
           </a:p>
         </p:txBody>
@@ -7018,8 +7157,8 @@
         </p:nvSpPr>
         <p:spPr>
           <a:xfrm>
-            <a:off x="9125712" y="3730752"/>
-            <a:ext cx="2752344" cy="2816352"/>
+            <a:off x="9034272" y="3730752"/>
+            <a:ext cx="2770632" cy="2852928"/>
           </a:xfrm>
           <a:prstGeom prst="rect">
             <a:avLst/>
@@ -7063,8 +7202,8 @@
         </p:nvSpPr>
         <p:spPr>
           <a:xfrm>
-            <a:off x="9217152" y="3785616"/>
-            <a:ext cx="2569464" cy="2706624"/>
+            <a:off x="9144000" y="3803904"/>
+            <a:ext cx="2551176" cy="2706624"/>
           </a:xfrm>
           <a:prstGeom prst="rect">
             <a:avLst/>
@@ -7093,27 +7232,30 @@
                 <a:spcPts val="100"/>
               </a:spcBef>
               <a:spcAft>
-                <a:spcPts val="200"/>
+                <a:spcPts val="400"/>
               </a:spcAft>
             </a:pPr>
             <a:r>
-              <a:rPr sz="860" b="1">
+              <a:rPr sz="900" b="1">
                 <a:solidFill>
                   <a:srgbClr val="1E3A8A"/>
                 </a:solidFill>
                 <a:latin typeface="Microsoft YaHei"/>
               </a:rPr>
-              <a:t>[支撑竞争力: 推流毫秒不抖与 100% 纯软自主可控]</a:t>
+              <a:t>[支撑竞争力: 推流毫秒不抖与纯软自主可控]</a:t>
             </a:r>
           </a:p>
           <a:p>
             <a:pPr>
               <a:lnSpc>
-                <a:spcPct val="115000"/>
+                <a:spcPct val="118000"/>
               </a:lnSpc>
-            </a:pPr>
-            <a:r>
-              <a:rPr sz="880" b="1">
+              <a:spcBef>
+                <a:spcPts val="700"/>
+              </a:spcBef>
+            </a:pPr>
+            <a:r>
+              <a:rPr sz="1000" b="1">
                 <a:solidFill>
                   <a:srgbClr val="1D4ED8"/>
                 </a:solidFill>
@@ -7122,17 +7264,26 @@
               <a:t>• 验证目标与认知：</a:t>
             </a:r>
             <a:r>
-              <a:rPr sz="880" b="0">
+              <a:rPr sz="1000">
                 <a:solidFill>
                   <a:srgbClr val="0F172A"/>
                 </a:solidFill>
                 <a:latin typeface="Microsoft YaHei"/>
               </a:rPr>
-              <a:t>检验多租户前后台混压下业务稳定性，并通过纯软方案证伪并替代外部硬件依赖；
-</a:t>
-            </a:r>
-            <a:r>
-              <a:rPr sz="880" b="1">
+              <a:t>检验多租户前后台混压下业务稳定性，并通过纯软方案证伪并替代外部硬件依赖；</a:t>
+            </a:r>
+          </a:p>
+          <a:p>
+            <a:pPr>
+              <a:lnSpc>
+                <a:spcPct val="118000"/>
+              </a:lnSpc>
+              <a:spcBef>
+                <a:spcPts val="700"/>
+              </a:spcBef>
+            </a:pPr>
+            <a:r>
+              <a:rPr sz="1000" b="1">
                 <a:solidFill>
                   <a:srgbClr val="1E3A8A"/>
                 </a:solidFill>
@@ -7141,17 +7292,26 @@
               <a:t>• PVT-07/08/09/CVT：</a:t>
             </a:r>
             <a:r>
-              <a:rPr sz="880" b="0">
+              <a:rPr sz="1000">
                 <a:solidFill>
                   <a:srgbClr val="475569"/>
                 </a:solidFill>
                 <a:latin typeface="Microsoft YaHei"/>
               </a:rPr>
-              <a:t>混压门禁 (TTFT 降≥20%、QPS 升≥10%、TPOT 干扰&lt;3%) + 组播 + 软件 RCU；
-</a:t>
-            </a:r>
-            <a:r>
-              <a:rPr sz="880" b="1">
+              <a:t>混压门禁 (TTFT 降≥20%、QPS 升≥10%、TPOT 干扰&lt;3%) + 组播 + 软件 RCU；</a:t>
+            </a:r>
+          </a:p>
+          <a:p>
+            <a:pPr>
+              <a:lnSpc>
+                <a:spcPct val="118000"/>
+              </a:lnSpc>
+              <a:spcBef>
+                <a:spcPts val="700"/>
+              </a:spcBef>
+            </a:pPr>
+            <a:r>
+              <a:rPr sz="1000" b="1">
                 <a:solidFill>
                   <a:srgbClr val="1D4ED8"/>
                 </a:solidFill>
@@ -7160,7 +7320,7 @@
               <a:t>• 竞争力贡献与效果：</a:t>
             </a:r>
             <a:r>
-              <a:rPr sz="880" b="0">
+              <a:rPr sz="1000">
                 <a:solidFill>
                   <a:srgbClr val="0F172A"/>
                 </a:solidFill>
@@ -11318,7 +11478,7 @@
         </p:nvGraphicFramePr>
         <p:xfrm>
           <a:off x="484632" y="2468880"/>
-          <a:ext cx="5413248" cy="2286000"/>
+          <a:ext cx="5413248" cy="2331720"/>
         </p:xfrm>
         <a:graphic>
           <a:graphicData uri="http://schemas.openxmlformats.org/drawingml/2006/table">
@@ -11333,7 +11493,7 @@
                 <a:gridCol w="1024128"/>
                 <a:gridCol w="1005840"/>
               </a:tblGrid>
-              <a:tr h="571500">
+              <a:tr h="582930">
                 <a:tc>
                   <a:txBody>
                     <a:bodyPr/>
@@ -11450,7 +11610,7 @@
                   </a:tcPr>
                 </a:tc>
               </a:tr>
-              <a:tr h="571500">
+              <a:tr h="582930">
                 <a:tc>
                   <a:txBody>
                     <a:bodyPr/>
@@ -11567,7 +11727,7 @@
                   </a:tcPr>
                 </a:tc>
               </a:tr>
-              <a:tr h="571500">
+              <a:tr h="582930">
                 <a:tc>
                   <a:txBody>
                     <a:bodyPr/>
@@ -11684,7 +11844,7 @@
                   </a:tcPr>
                 </a:tc>
               </a:tr>
-              <a:tr h="571500">
+              <a:tr h="582930">
                 <a:tc>
                   <a:txBody>
                     <a:bodyPr/>
@@ -11813,8 +11973,8 @@
         </p:nvSpPr>
         <p:spPr>
           <a:xfrm>
-            <a:off x="484632" y="4892040"/>
-            <a:ext cx="5422392" cy="1508760"/>
+            <a:off x="484632" y="4919471"/>
+            <a:ext cx="5422392" cy="1463040"/>
           </a:xfrm>
           <a:prstGeom prst="rect">
             <a:avLst/>
@@ -11840,21 +12000,22 @@
           <a:p>
             <a:pPr>
               <a:lnSpc>
-                <a:spcPct val="120000"/>
+                <a:spcPct val="118000"/>
               </a:lnSpc>
               <a:spcBef>
                 <a:spcPts val="600"/>
               </a:spcBef>
             </a:pPr>
             <a:r>
-              <a:rPr sz="1100">
+              <a:rPr sz="1050">
                 <a:solidFill>
                   <a:srgbClr val="475569"/>
                 </a:solidFill>
                 <a:latin typeface="Microsoft YaHei"/>
               </a:rPr>
               <a:t>1. URMA 单边直读彻底消除了多轮 RPC 握手带来的网络 RTT 风暴，将元数据查询时延从百微秒级直接压降一个数量级（&lt; 10µs）；
-2. 零 CPU 介入与内存拷贝，保障了高并发场景下控制面的极速吞吐。</a:t>
+2. 零 CPU 介入与内存拷贝，保障了高并发场景下控制面的极速吞吐；
+3. 消除 Host 争用：CPU 仅下发单边描述符，不参与正文搬运，彻底释放算力。</a:t>
             </a:r>
           </a:p>
         </p:txBody>
@@ -11923,7 +12084,7 @@
         </p:nvGraphicFramePr>
         <p:xfrm>
           <a:off x="6345936" y="2468880"/>
-          <a:ext cx="5422392" cy="2286000"/>
+          <a:ext cx="5422392" cy="2331720"/>
         </p:xfrm>
         <a:graphic>
           <a:graphicData uri="http://schemas.openxmlformats.org/drawingml/2006/table">
@@ -11939,7 +12100,7 @@
                 <a:gridCol w="868680"/>
                 <a:gridCol w="1051560"/>
               </a:tblGrid>
-              <a:tr h="381000">
+              <a:tr h="388620">
                 <a:tc>
                   <a:txBody>
                     <a:bodyPr/>
@@ -12079,7 +12240,7 @@
                   </a:tcPr>
                 </a:tc>
               </a:tr>
-              <a:tr h="381000">
+              <a:tr h="388620">
                 <a:tc>
                   <a:txBody>
                     <a:bodyPr/>
@@ -12219,7 +12380,7 @@
                   </a:tcPr>
                 </a:tc>
               </a:tr>
-              <a:tr h="381000">
+              <a:tr h="388620">
                 <a:tc>
                   <a:txBody>
                     <a:bodyPr/>
@@ -12359,7 +12520,7 @@
                   </a:tcPr>
                 </a:tc>
               </a:tr>
-              <a:tr h="381000">
+              <a:tr h="388620">
                 <a:tc>
                   <a:txBody>
                     <a:bodyPr/>
@@ -12499,7 +12660,7 @@
                   </a:tcPr>
                 </a:tc>
               </a:tr>
-              <a:tr h="381000">
+              <a:tr h="388620">
                 <a:tc>
                   <a:txBody>
                     <a:bodyPr/>
@@ -12639,7 +12800,7 @@
                   </a:tcPr>
                 </a:tc>
               </a:tr>
-              <a:tr h="381000">
+              <a:tr h="388620">
                 <a:tc>
                   <a:txBody>
                     <a:bodyPr/>
@@ -12791,8 +12952,8 @@
         </p:nvSpPr>
         <p:spPr>
           <a:xfrm>
-            <a:off x="6345936" y="4892040"/>
-            <a:ext cx="5422392" cy="1508760"/>
+            <a:off x="6345936" y="4919471"/>
+            <a:ext cx="5422392" cy="1463040"/>
           </a:xfrm>
           <a:prstGeom prst="rect">
             <a:avLst/>
@@ -12818,21 +12979,22 @@
           <a:p>
             <a:pPr>
               <a:lnSpc>
-                <a:spcPct val="120000"/>
+                <a:spcPct val="118000"/>
               </a:lnSpc>
               <a:spcBef>
                 <a:spcPts val="600"/>
               </a:spcBef>
             </a:pPr>
             <a:r>
-              <a:rPr sz="1100">
+              <a:rPr sz="1050">
                 <a:solidFill>
                   <a:srgbClr val="475569"/>
                 </a:solidFill>
                 <a:latin typeface="Microsoft YaHei"/>
               </a:rPr>
               <a:t>1. 实测证实低复用率（30%）下远端拉取耗时反超重算，盲目拉取存在负收益反噬，必须由 QueryPlan 前置动态决策引擎按条件精准选路；
-2. 随着复用率升至 70%~98%，Saved-Prefill 净收益迅速放大，72B 大模型首字时延降幅超 50%。</a:t>
+2. 随着复用率升至 70%~98%，Saved-Prefill 净收益迅速放大，72B 大模型首字时延降幅超 50%；
+3. 算力释放与降本：高复用下释放算力专注有效生成，降低单次有效请求综合计算成本。</a:t>
             </a:r>
           </a:p>
         </p:txBody>
@@ -13055,7 +13217,7 @@
           <a:p>
             <a:pPr>
               <a:spcBef>
-                <a:spcPts val="600"/>
+                <a:spcPts val="800"/>
               </a:spcBef>
             </a:pPr>
             <a:r>
@@ -13137,7 +13299,7 @@
           <a:p>
             <a:pPr>
               <a:spcBef>
-                <a:spcPts val="600"/>
+                <a:spcPts val="800"/>
               </a:spcBef>
             </a:pPr>
             <a:r>
@@ -13341,7 +13503,7 @@
           <a:p>
             <a:pPr>
               <a:spcBef>
-                <a:spcPts val="600"/>
+                <a:spcPts val="800"/>
               </a:spcBef>
             </a:pPr>
             <a:r>
@@ -13376,7 +13538,7 @@
           <a:p>
             <a:pPr>
               <a:spcBef>
-                <a:spcPts val="800"/>
+                <a:spcPts val="1000"/>
               </a:spcBef>
             </a:pPr>
             <a:r>
@@ -13470,7 +13632,35 @@
                 </a:solidFill>
                 <a:latin typeface="Microsoft YaHei"/>
               </a:rPr>
-              <a:t>以立项进展和阶段性实测数据为依据，向团队主管申请在 L3 传输管理与 L4 驱动底座方向增补 2~3 名专职研发力量。</a:t>
+              <a:t>以立项进展和阶段性实测数据为依据，向团队主管申请在 L3 传输管理与 L4 驱动底座方向增补 2~3 名专职研发力量；</a:t>
+            </a:r>
+          </a:p>
+          <a:p>
+            <a:pPr>
+              <a:lnSpc>
+                <a:spcPct val="120000"/>
+              </a:lnSpc>
+              <a:spcBef>
+                <a:spcPts val="600"/>
+              </a:spcBef>
+            </a:pPr>
+            <a:r>
+              <a:rPr sz="1100" b="1">
+                <a:solidFill>
+                  <a:srgbClr val="1E3A8A"/>
+                </a:solidFill>
+                <a:latin typeface="Microsoft YaHei"/>
+              </a:rPr>
+              <a:t>4. 设立量化止损门限： </a:t>
+            </a:r>
+            <a:r>
+              <a:rPr sz="1100">
+                <a:solidFill>
+                  <a:srgbClr val="475569"/>
+                </a:solidFill>
+                <a:latin typeface="Microsoft YaHei"/>
+              </a:rPr>
+              <a:t>在 E0/E1/E2 各验证阶段设立明确的量化证伪标准与止损门禁，若实测不达预期即刻触发方案降级与边界收缩。</a:t>
             </a:r>
           </a:p>
         </p:txBody>
